--- a/Presentation/STA518-Final-Presentation.pptx
+++ b/Presentation/STA518-Final-Presentation.pptx
@@ -129,289 +129,9 @@
     <p1510:client id="{003035BC-B319-49A2-8B98-07D879D13814}" v="152" dt="2026-04-30T01:30:59.102"/>
     <p1510:client id="{2FEAD95E-7479-415F-B4BC-BD6F0DF5D2BF}" v="375" dt="2026-04-30T04:36:11.047"/>
     <p1510:client id="{7A5F2E3E-80CD-F74A-6135-AC8D2EC0148E}" v="3" dt="2026-04-30T02:28:31.799"/>
+    <p1510:client id="{EB500E35-6BAE-42B4-8806-AFD2C2001A92}" v="6" dt="2026-04-30T11:43:02.896"/>
   </p1510:revLst>
 </p1510:revInfo>
-</file>
-
-<file path=ppt/charts/chart1.xml><?xml version="1.0" encoding="utf-8"?>
-<c:chartSpace xmlns:c="http://schemas.openxmlformats.org/drawingml/2006/chart" xmlns:a="http://schemas.openxmlformats.org/drawingml/2006/main" xmlns:r="http://schemas.openxmlformats.org/officeDocument/2006/relationships" xmlns:c16r2="http://schemas.microsoft.com/office/drawing/2015/06/chart">
-  <c:date1904 val="0"/>
-  <c:lang val="en-US"/>
-  <c:roundedCorners val="1"/>
-  <c:style val="2"/>
-  <c:chart>
-    <c:autoTitleDeleted val="1"/>
-    <c:plotArea>
-      <c:layout/>
-      <c:barChart>
-        <c:barDir val="col"/>
-        <c:grouping val="clustered"/>
-        <c:varyColors val="0"/>
-        <c:ser>
-          <c:idx val="0"/>
-          <c:order val="0"/>
-          <c:tx>
-            <c:strRef>
-              <c:f>Sheet1!$B$1</c:f>
-              <c:strCache>
-                <c:ptCount val="1"/>
-                <c:pt idx="0">
-                  <c:v>Permutations</c:v>
-                </c:pt>
-              </c:strCache>
-            </c:strRef>
-          </c:tx>
-          <c:spPr>
-            <a:solidFill>
-              <a:srgbClr val="90CAF9"/>
-            </a:solidFill>
-            <a:effectLst/>
-          </c:spPr>
-          <c:invertIfNegative val="0"/>
-          <c:cat>
-            <c:strRef>
-              <c:f>Sheet1!$A$2:$A$18</c:f>
-              <c:strCache>
-                <c:ptCount val="17"/>
-                <c:pt idx="0">
-                  <c:v>$-8K</c:v>
-                </c:pt>
-                <c:pt idx="1">
-                  <c:v>$-7K</c:v>
-                </c:pt>
-                <c:pt idx="2">
-                  <c:v>$-6K</c:v>
-                </c:pt>
-                <c:pt idx="3">
-                  <c:v>$-5K</c:v>
-                </c:pt>
-                <c:pt idx="4">
-                  <c:v>$-4K</c:v>
-                </c:pt>
-                <c:pt idx="5">
-                  <c:v>$-3K</c:v>
-                </c:pt>
-                <c:pt idx="6">
-                  <c:v>$-2K</c:v>
-                </c:pt>
-                <c:pt idx="7">
-                  <c:v>$-1K</c:v>
-                </c:pt>
-                <c:pt idx="8">
-                  <c:v>$0K</c:v>
-                </c:pt>
-                <c:pt idx="9">
-                  <c:v>$1K</c:v>
-                </c:pt>
-                <c:pt idx="10">
-                  <c:v>$2K</c:v>
-                </c:pt>
-                <c:pt idx="11">
-                  <c:v>$3K</c:v>
-                </c:pt>
-                <c:pt idx="12">
-                  <c:v>$4K</c:v>
-                </c:pt>
-                <c:pt idx="13">
-                  <c:v>$5K</c:v>
-                </c:pt>
-                <c:pt idx="14">
-                  <c:v>$6K</c:v>
-                </c:pt>
-                <c:pt idx="15">
-                  <c:v>$7K</c:v>
-                </c:pt>
-                <c:pt idx="16">
-                  <c:v>$8K</c:v>
-                </c:pt>
-              </c:strCache>
-            </c:strRef>
-          </c:cat>
-          <c:val>
-            <c:numRef>
-              <c:f>Sheet1!$B$2:$B$18</c:f>
-              <c:numCache>
-                <c:formatCode>General</c:formatCode>
-                <c:ptCount val="17"/>
-                <c:pt idx="0">
-                  <c:v>2</c:v>
-                </c:pt>
-                <c:pt idx="1">
-                  <c:v>5</c:v>
-                </c:pt>
-                <c:pt idx="2">
-                  <c:v>15</c:v>
-                </c:pt>
-                <c:pt idx="3">
-                  <c:v>40</c:v>
-                </c:pt>
-                <c:pt idx="4">
-                  <c:v>90</c:v>
-                </c:pt>
-                <c:pt idx="5">
-                  <c:v>180</c:v>
-                </c:pt>
-                <c:pt idx="6">
-                  <c:v>310</c:v>
-                </c:pt>
-                <c:pt idx="7">
-                  <c:v>430</c:v>
-                </c:pt>
-                <c:pt idx="8">
-                  <c:v>490</c:v>
-                </c:pt>
-                <c:pt idx="9">
-                  <c:v>420</c:v>
-                </c:pt>
-                <c:pt idx="10">
-                  <c:v>300</c:v>
-                </c:pt>
-                <c:pt idx="11">
-                  <c:v>170</c:v>
-                </c:pt>
-                <c:pt idx="12">
-                  <c:v>85</c:v>
-                </c:pt>
-                <c:pt idx="13">
-                  <c:v>35</c:v>
-                </c:pt>
-                <c:pt idx="14">
-                  <c:v>12</c:v>
-                </c:pt>
-                <c:pt idx="15">
-                  <c:v>4</c:v>
-                </c:pt>
-                <c:pt idx="16">
-                  <c:v>1</c:v>
-                </c:pt>
-              </c:numCache>
-            </c:numRef>
-          </c:val>
-          <c:extLst>
-            <c:ext xmlns:c16="http://schemas.microsoft.com/office/drawing/2014/chart" uri="{C3380CC4-5D6E-409C-BE32-E72D297353CC}">
-              <c16:uniqueId val="{00000000-EAE9-4C59-81D2-5D8FD49EBFD2}"/>
-            </c:ext>
-          </c:extLst>
-        </c:ser>
-        <c:dLbls>
-          <c:showLegendKey val="0"/>
-          <c:showVal val="0"/>
-          <c:showCatName val="0"/>
-          <c:showSerName val="0"/>
-          <c:showPercent val="0"/>
-          <c:showBubbleSize val="0"/>
-        </c:dLbls>
-        <c:gapWidth val="10"/>
-        <c:axId val="2094734554"/>
-        <c:axId val="2094734552"/>
-      </c:barChart>
-      <c:catAx>
-        <c:axId val="2094734554"/>
-        <c:scaling>
-          <c:orientation val="minMax"/>
-        </c:scaling>
-        <c:delete val="0"/>
-        <c:axPos val="b"/>
-        <c:numFmt formatCode="General" sourceLinked="1"/>
-        <c:majorTickMark val="out"/>
-        <c:minorTickMark val="none"/>
-        <c:tickLblPos val="low"/>
-        <c:spPr>
-          <a:ln w="12700" cap="flat">
-            <a:solidFill>
-              <a:srgbClr val="888888"/>
-            </a:solidFill>
-            <a:prstDash val="solid"/>
-            <a:round/>
-          </a:ln>
-        </c:spPr>
-        <c:txPr>
-          <a:bodyPr/>
-          <a:lstStyle/>
-          <a:p>
-            <a:pPr>
-              <a:defRPr sz="1200" b="0" i="0" u="none" strike="noStrike">
-                <a:solidFill>
-                  <a:srgbClr val="64748B"/>
-                </a:solidFill>
-                <a:latin typeface="Arial"/>
-              </a:defRPr>
-            </a:pPr>
-            <a:endParaRPr lang="en-US"/>
-          </a:p>
-        </c:txPr>
-        <c:crossAx val="2094734552"/>
-        <c:crosses val="autoZero"/>
-        <c:auto val="1"/>
-        <c:lblAlgn val="ctr"/>
-        <c:lblOffset val="100"/>
-        <c:tickLblSkip val="4"/>
-        <c:noMultiLvlLbl val="1"/>
-      </c:catAx>
-      <c:valAx>
-        <c:axId val="2094734552"/>
-        <c:scaling>
-          <c:orientation val="minMax"/>
-        </c:scaling>
-        <c:delete val="0"/>
-        <c:axPos val="l"/>
-        <c:numFmt formatCode="General" sourceLinked="0"/>
-        <c:majorTickMark val="out"/>
-        <c:minorTickMark val="none"/>
-        <c:tickLblPos val="nextTo"/>
-        <c:spPr>
-          <a:ln w="12700" cap="flat">
-            <a:solidFill>
-              <a:srgbClr val="888888"/>
-            </a:solidFill>
-            <a:prstDash val="solid"/>
-            <a:round/>
-          </a:ln>
-        </c:spPr>
-        <c:txPr>
-          <a:bodyPr/>
-          <a:lstStyle/>
-          <a:p>
-            <a:pPr>
-              <a:defRPr sz="1200" b="0" i="0" u="none" strike="noStrike">
-                <a:solidFill>
-                  <a:srgbClr val="64748B"/>
-                </a:solidFill>
-                <a:latin typeface="Arial"/>
-              </a:defRPr>
-            </a:pPr>
-            <a:endParaRPr lang="en-US"/>
-          </a:p>
-        </c:txPr>
-        <c:crossAx val="2094734554"/>
-        <c:crosses val="autoZero"/>
-        <c:crossBetween val="between"/>
-      </c:valAx>
-      <c:spPr>
-        <a:noFill/>
-        <a:ln>
-          <a:noFill/>
-        </a:ln>
-        <a:effectLst/>
-      </c:spPr>
-    </c:plotArea>
-    <c:plotVisOnly val="1"/>
-    <c:dispBlanksAs val="span"/>
-    <c:showDLblsOverMax val="1"/>
-  </c:chart>
-  <c:spPr>
-    <a:solidFill>
-      <a:srgbClr val="FFFFFF"/>
-    </a:solidFill>
-    <a:ln>
-      <a:noFill/>
-    </a:ln>
-    <a:effectLst/>
-  </c:spPr>
-  <c:externalData r:id="rId1">
-    <c:autoUpdate val="0"/>
-  </c:externalData>
-</c:chartSpace>
 </file>
 
 <file path=ppt/notesMasters/notesMaster1.xml><?xml version="1.0" encoding="utf-8"?>
@@ -495,7 +215,7 @@
           </a:lstStyle>
           <a:p>
             <a:fld id="{0A3E6EAD-F935-4764-AA5F-970F56596155}" type="datetimeFigureOut">
-              <a:t>4/29/2026</a:t>
+              <a:t>4/30/2026</a:t>
             </a:fld>
             <a:endParaRPr lang="en-US"/>
           </a:p>
@@ -2182,7 +1902,7 @@
           <a:p>
             <a:fld id="{C764DE79-268F-4C1A-8933-263129D2AF90}" type="datetimeFigureOut">
               <a:rPr lang="en-US" dirty="0"/>
-              <a:t>4/29/2026</a:t>
+              <a:t>4/30/2026</a:t>
             </a:fld>
             <a:endParaRPr lang="en-US"/>
           </a:p>
@@ -2350,7 +2070,7 @@
           <a:p>
             <a:fld id="{C764DE79-268F-4C1A-8933-263129D2AF90}" type="datetimeFigureOut">
               <a:rPr lang="en-US" dirty="0"/>
-              <a:t>4/29/2026</a:t>
+              <a:t>4/30/2026</a:t>
             </a:fld>
             <a:endParaRPr lang="en-US"/>
           </a:p>
@@ -2528,7 +2248,7 @@
           <a:p>
             <a:fld id="{C764DE79-268F-4C1A-8933-263129D2AF90}" type="datetimeFigureOut">
               <a:rPr lang="en-US" dirty="0"/>
-              <a:t>4/29/2026</a:t>
+              <a:t>4/30/2026</a:t>
             </a:fld>
             <a:endParaRPr lang="en-US"/>
           </a:p>
@@ -2731,7 +2451,7 @@
           <a:p>
             <a:fld id="{C764DE79-268F-4C1A-8933-263129D2AF90}" type="datetimeFigureOut">
               <a:rPr lang="en-US" dirty="0"/>
-              <a:t>4/29/2026</a:t>
+              <a:t>4/30/2026</a:t>
             </a:fld>
             <a:endParaRPr lang="en-US"/>
           </a:p>
@@ -2976,7 +2696,7 @@
           <a:p>
             <a:fld id="{C764DE79-268F-4C1A-8933-263129D2AF90}" type="datetimeFigureOut">
               <a:rPr lang="en-US" dirty="0"/>
-              <a:t>4/29/2026</a:t>
+              <a:t>4/30/2026</a:t>
             </a:fld>
             <a:endParaRPr lang="en-US"/>
           </a:p>
@@ -3205,7 +2925,7 @@
           <a:p>
             <a:fld id="{C764DE79-268F-4C1A-8933-263129D2AF90}" type="datetimeFigureOut">
               <a:rPr lang="en-US" dirty="0"/>
-              <a:t>4/29/2026</a:t>
+              <a:t>4/30/2026</a:t>
             </a:fld>
             <a:endParaRPr lang="en-US"/>
           </a:p>
@@ -3569,7 +3289,7 @@
           <a:p>
             <a:fld id="{C764DE79-268F-4C1A-8933-263129D2AF90}" type="datetimeFigureOut">
               <a:rPr lang="en-US" dirty="0"/>
-              <a:t>4/29/2026</a:t>
+              <a:t>4/30/2026</a:t>
             </a:fld>
             <a:endParaRPr lang="en-US"/>
           </a:p>
@@ -3686,7 +3406,7 @@
           <a:p>
             <a:fld id="{C764DE79-268F-4C1A-8933-263129D2AF90}" type="datetimeFigureOut">
               <a:rPr lang="en-US" dirty="0"/>
-              <a:t>4/29/2026</a:t>
+              <a:t>4/30/2026</a:t>
             </a:fld>
             <a:endParaRPr lang="en-US"/>
           </a:p>
@@ -3781,7 +3501,7 @@
           <a:p>
             <a:fld id="{C764DE79-268F-4C1A-8933-263129D2AF90}" type="datetimeFigureOut">
               <a:rPr lang="en-US" dirty="0"/>
-              <a:t>4/29/2026</a:t>
+              <a:t>4/30/2026</a:t>
             </a:fld>
             <a:endParaRPr lang="en-US"/>
           </a:p>
@@ -4056,7 +3776,7 @@
           <a:p>
             <a:fld id="{C764DE79-268F-4C1A-8933-263129D2AF90}" type="datetimeFigureOut">
               <a:rPr lang="en-US" dirty="0"/>
-              <a:t>4/29/2026</a:t>
+              <a:t>4/30/2026</a:t>
             </a:fld>
             <a:endParaRPr lang="en-US"/>
           </a:p>
@@ -4308,7 +4028,7 @@
           <a:p>
             <a:fld id="{C764DE79-268F-4C1A-8933-263129D2AF90}" type="datetimeFigureOut">
               <a:rPr lang="en-US" dirty="0"/>
-              <a:t>4/29/2026</a:t>
+              <a:t>4/30/2026</a:t>
             </a:fld>
             <a:endParaRPr lang="en-US"/>
           </a:p>
@@ -4519,7 +4239,7 @@
           <a:p>
             <a:fld id="{C764DE79-268F-4C1A-8933-263129D2AF90}" type="datetimeFigureOut">
               <a:rPr lang="en-US" dirty="0"/>
-              <a:t>4/29/2026</a:t>
+              <a:t>4/30/2026</a:t>
             </a:fld>
             <a:endParaRPr lang="en-US"/>
           </a:p>
@@ -7251,22 +6971,6 @@
           </a:p>
         </p:txBody>
       </p:sp>
-      <p:graphicFrame>
-        <p:nvGraphicFramePr>
-          <p:cNvPr id="10" name="Chart 0"/>
-          <p:cNvGraphicFramePr/>
-          <p:nvPr/>
-        </p:nvGraphicFramePr>
-        <p:xfrm>
-          <a:off x="6217920" y="1219200"/>
-          <a:ext cx="5364480" cy="4754880"/>
-        </p:xfrm>
-        <a:graphic>
-          <a:graphicData uri="http://schemas.openxmlformats.org/drawingml/2006/chart">
-            <c:chart xmlns:c="http://schemas.openxmlformats.org/drawingml/2006/chart" xmlns:r="http://schemas.openxmlformats.org/officeDocument/2006/relationships" r:id="rId3"/>
-          </a:graphicData>
-        </a:graphic>
-      </p:graphicFrame>
       <p:sp>
         <p:nvSpPr>
           <p:cNvPr id="11" name="Text 8"/>
@@ -7521,6 +7225,36 @@
           </a:p>
         </p:txBody>
       </p:sp>
+      <p:pic>
+        <p:nvPicPr>
+          <p:cNvPr id="13" name="Picture 12" descr="A graph of a number of individuals&#10;&#10;AI-generated content may be incorrect.">
+            <a:extLst>
+              <a:ext uri="{FF2B5EF4-FFF2-40B4-BE49-F238E27FC236}">
+                <a16:creationId xmlns:a16="http://schemas.microsoft.com/office/drawing/2014/main" id="{04865A89-44E0-777A-BE2E-3E18AB370EB0}"/>
+              </a:ext>
+            </a:extLst>
+          </p:cNvPr>
+          <p:cNvPicPr>
+            <a:picLocks noChangeAspect="1"/>
+          </p:cNvPicPr>
+          <p:nvPr/>
+        </p:nvPicPr>
+        <p:blipFill>
+          <a:blip r:embed="rId3"/>
+          <a:stretch>
+            <a:fillRect/>
+          </a:stretch>
+        </p:blipFill>
+        <p:spPr>
+          <a:xfrm>
+            <a:off x="6091236" y="1763857"/>
+            <a:ext cx="5828435" cy="3939887"/>
+          </a:xfrm>
+          <a:prstGeom prst="rect">
+            <a:avLst/>
+          </a:prstGeom>
+        </p:spPr>
+      </p:pic>
     </p:spTree>
     <p:extLst>
       <p:ext uri="{BB962C8B-B14F-4D97-AF65-F5344CB8AC3E}">
